--- a/10-Knowledge-Products/KP1-GEA/videos/module_5/en/decks/KP1_M5_5.6_Deck_v0.1.pptx
+++ b/10-Knowledge-Products/KP1-GEA/videos/module_5/en/decks/KP1_M5_5.6_Deck_v0.1.pptx
@@ -13141,7 +13141,7 @@
         <p:spPr>
           <a:xfrm>
             <a:off x="658368" y="1600200"/>
-            <a:ext cx="10881360" cy="2651760"/>
+            <a:ext cx="10881360" cy="1673352"/>
           </a:xfrm>
           <a:prstGeom prst="rect">
             <a:avLst/>
@@ -13195,7 +13195,7 @@
         </p:nvSpPr>
         <p:spPr>
           <a:xfrm>
-            <a:off x="658368" y="4434840"/>
+            <a:off x="658368" y="3456432"/>
             <a:ext cx="10881360" cy="1325880"/>
           </a:xfrm>
           <a:prstGeom prst="roundRect">
@@ -13241,7 +13241,7 @@
         </p:nvSpPr>
         <p:spPr>
           <a:xfrm>
-            <a:off x="859536" y="4626864"/>
+            <a:off x="859536" y="3648456"/>
             <a:ext cx="10479024" cy="1051560"/>
           </a:xfrm>
           <a:prstGeom prst="rect">
@@ -14139,7 +14139,7 @@
         <p:spPr>
           <a:xfrm>
             <a:off x="658368" y="1600200"/>
-            <a:ext cx="10881360" cy="2651760"/>
+            <a:ext cx="10881360" cy="1673352"/>
           </a:xfrm>
           <a:prstGeom prst="rect">
             <a:avLst/>
@@ -14193,7 +14193,7 @@
         </p:nvSpPr>
         <p:spPr>
           <a:xfrm>
-            <a:off x="658368" y="4434840"/>
+            <a:off x="658368" y="3456432"/>
             <a:ext cx="10881360" cy="1325880"/>
           </a:xfrm>
           <a:prstGeom prst="roundRect">
@@ -14239,7 +14239,7 @@
         </p:nvSpPr>
         <p:spPr>
           <a:xfrm>
-            <a:off x="859536" y="4626864"/>
+            <a:off x="859536" y="3648456"/>
             <a:ext cx="10479024" cy="1051560"/>
           </a:xfrm>
           <a:prstGeom prst="rect">

--- a/10-Knowledge-Products/KP1-GEA/videos/module_5/en/decks/KP1_M5_5.6_Deck_v0.1.pptx
+++ b/10-Knowledge-Products/KP1-GEA/videos/module_5/en/decks/KP1_M5_5.6_Deck_v0.1.pptx
@@ -1003,19 +1003,13 @@
           <a:lstStyle/>
           <a:p>
             <a:r>
-              <a:t>VO, slide 1: The fifth play produces the material you need to persuade and to spread the method: comparator cases for a briefing, and a transfer plan for a new sector. Both are research-heavy and slow by hand. The play drafts them — with one strict rule about sources.</a:t>
+              <a:t>VO, slide 1: Suppose you have the commitment. How do you actually roll this out across a government, without trying to do everything at once and failing? The answer is the same discipline the method uses inside one sector, applied to the whole country: a wave roadmap. Start small, prove it, build the shared muscle, then bring sectors on one at a time.</a:t>
             </a:r>
           </a:p>
           <a:p/>
           <a:p>
             <a:r>
-              <a:t>Retrieval prompt — ask before playing on: what is the single most dangerous thing AI does on a comparator card? Answer on the next slide but one.</a:t>
-            </a:r>
-          </a:p>
-          <a:p/>
-          <a:p>
-            <a:r>
-              <a:t>On screen: the play's copy-paste prompt is not shown on a slide — it ships in the video description so the viewer can run it on the other half of the screen.</a:t>
+              <a:t>On screen: the copy-paste prompt is not shown on a slide — it ships in the video description so the viewer can draft the artefact on the other half of the screen.</a:t>
             </a:r>
           </a:p>
         </p:txBody>
@@ -1085,7 +1079,13 @@
           <a:lstStyle/>
           <a:p>
             <a:r>
-              <a:t>VO: First, comparator cards. You give the AI your country's characteristics — size, income level, governance type, region, the constraints you face. It returns three to five genuinely comparable countries, prioritising African and other developing-country examples: for each, why it is comparable, what they actually built, one transferable lesson, and a public source for every substantive claim. Instead of always reaching for Estonia, you get signposts that look like your country, which land far better in a cabinet briefing.</a:t>
+              <a:t>VO: Wave one is one sector, done well. Pick the sector with a clear flagship the minister cares about — the single learner record, the single patient record. Run the full method there, end to end. But notice what wave one really builds: not just that sector's architecture, but the national foundations — the permanent team, the governance board, and the first shared platforms like identity and data exchange. Wave one looks like one sector. It is actually the foundation the whole rollout stands on.</a:t>
+            </a:r>
+          </a:p>
+          <a:p/>
+          <a:p>
+            <a:r>
+              <a:t>On screen: the sector block standing on a wider foundation block — reveal the base on 'but notice what wave one really builds'.</a:t>
             </a:r>
           </a:p>
         </p:txBody>
@@ -1155,13 +1155,13 @@
           <a:lstStyle/>
           <a:p>
             <a:r>
-              <a:t>VO: Here is the strict rule for this play, because it is where AI is most dangerous. Every claim on a comparator card must have a real, checkable source — and AI will invent plausible-looking citations that do not say what the card claims, or do not exist at all. So the rule is: cite or discard. Open the source for every example. If it does not actually document what the card says, throw that example out. A comparator card with a fabricated citation, caught in a cabinet meeting, discredits your whole briefing.</a:t>
+              <a:t>VO: From wave two, each new sector reuses what wave one built. The health sector consumes the identity platform and the data-exchange backbone that already exist. Its run of the method is lighter, because the team, the framework and the governance are in place. It delivers faster and costs less. And every sector that joins makes the next one easier still, because the shared platforms get more complete and the team more practised. The rollout accelerates as it goes — the opposite of a programme that gets harder under its own weight.</a:t>
             </a:r>
           </a:p>
           <a:p/>
           <a:p>
             <a:r>
-              <a:t>Production cue: this slide answers the retrieval prompt set on the title slide. The operative beat of the video — hold it a beat longer.</a:t>
+              <a:t>On screen: a wave roadmap — each wave a smaller block than the last, the platform bar beneath growing, the Board bar across the top (the next slide's subject). Reveal the waves left to right.</a:t>
             </a:r>
           </a:p>
         </p:txBody>
@@ -1231,13 +1231,13 @@
           <a:lstStyle/>
           <a:p>
             <a:r>
-              <a:t>VO: Second, the sector-transfer plan. The method you have built on education transfers to health, to agriculture, to social protection — only the institutions and the data domains change. You give the AI a new sector's bodies, and it returns a one-page plan: the bodies classified, this sector's equivalent of the single learner record, the five phase deliverables named for this sector, and a suggested first two waves. It is the fastest way to start the method on a sector you have just been handed.</a:t>
+              <a:t>VO: And govern the rollout rather than just launching it. The same board that reviews projects inside a sector governs the national pipeline: which sector comes next, what each must reuse, where an exception is genuinely warranted. This keeps the rollout coherent — every new sector building on the shared foundation instead of starting its own. A rollout that is launched and left drifts back into fragmentation, one sector at a time. A rollout that is governed compounds into a single national architecture.</a:t>
             </a:r>
           </a:p>
           <a:p/>
           <a:p>
             <a:r>
-              <a:t>On screen: health, agriculture and social protection are named as places the method applies, not as worked examples — education is the worked sector throughout KP1.</a:t>
+              <a:t>Production cue: the pivotal slide of this video. Hold it a beat longer.</a:t>
             </a:r>
           </a:p>
         </p:txBody>
@@ -1307,7 +1307,7 @@
           <a:lstStyle/>
           <a:p>
             <a:r>
-              <a:t>VO: One caution on the transfer plan, the same as every play. It is a starting structure, not an assessment. It guesses the duplicated data domain and the likely gaps for the new sector — and it may guess wrong, because it has not looked. Use it to start Discovery faster, not to skip it. The real gaps come from running the method on the real sector, not from a plan written before anyone has looked.</a:t>
+              <a:t>VO: Finally, report the national picture upward, on one page, every quarter. How many sectors are live. The re-use rate across them. Which shared platforms are in place. This does two things. It shows the minister the national capability actually growing — sector by sector, saving by saving — which is what sustains the funding across a change of government. And it lets you see, early, if a sector is drifting from the shared foundation, while it is still cheap to correct. The national scorecard is how a multi-year rollout stays funded and stays coherent.</a:t>
             </a:r>
           </a:p>
         </p:txBody>
@@ -1377,7 +1377,7 @@
           <a:lstStyle/>
           <a:p>
             <a:r>
-              <a:t>VO: So the fifth play gives you the persuasion and spread material — comparator cards that look like your country, and a plan to take the method to a new sector. Use it freely, under one discipline: cite or discard, and confirm by looking. Evidence you cannot verify is worse than none.</a:t>
+              <a:t>VO: So the rollout is a wave roadmap at national scale. One sector to prove it and build the foundations. Then sectors one at a time, each reusing the last, each cheaper, all governed into one coherent architecture and reported on a single page. That is how an approach that works in one sector becomes how your whole government works.</a:t>
             </a:r>
           </a:p>
         </p:txBody>
@@ -11722,7 +11722,7 @@
                 </a:solidFill>
                 <a:latin typeface="Arial"/>
               </a:rPr>
-              <a:t>5.6 — Play 5 — Generate comparator cases and a sector-transfer plan</a:t>
+              <a:t>5.6 — Roll it out — from one sector to a national EA practice</a:t>
             </a:r>
           </a:p>
         </p:txBody>
@@ -11838,7 +11838,7 @@
                 </a:solidFill>
                 <a:latin typeface="Arial"/>
               </a:rPr>
-              <a:t>The fifth play generates the persuasion material — comparator-country cards tuned to your context with real sources, and a one-page plan to run the method on a new sector — for the briefings and pitches where you need evidence and a path.</a:t>
+              <a:t>Rolling this out nationally is itself a wave roadmap — start with one sector that proves the pattern and builds the shared platforms, then bring sectors on one at a time, each cheaper than the last, until the architecture is how your whole government works.</a:t>
             </a:r>
           </a:p>
         </p:txBody>
@@ -11935,7 +11935,7 @@
                 </a:solidFill>
                 <a:latin typeface="Arial"/>
               </a:rPr>
-              <a:t>Chief architect · senior architect · sector ICT lead</a:t>
+              <a:t>Director-general · head of a sectoral ICT unit · technical secretary</a:t>
             </a:r>
           </a:p>
         </p:txBody>
@@ -12013,7 +12013,7 @@
                 </a:solidFill>
                 <a:latin typeface="Arial"/>
               </a:rPr>
-              <a:t>THE FIVE PLAYS THIS MODULE TEACHES</a:t>
+              <a:t>THE CASE YOU CARRY INTO THE ROOM</a:t>
             </a:r>
           </a:p>
         </p:txBody>
@@ -12068,7 +12068,7 @@
                 </a:solidFill>
                 <a:latin typeface="Arial"/>
               </a:rPr>
-              <a:t>Play 1 — Discovery and Assess</a:t>
+              <a:t>Proven — four real governments</a:t>
             </a:r>
           </a:p>
         </p:txBody>
@@ -12123,7 +12123,7 @@
                 </a:solidFill>
                 <a:latin typeface="Arial"/>
               </a:rPr>
-              <a:t>Play 2 — the re-use business case</a:t>
+              <a:t>Portable — sector after sector</a:t>
             </a:r>
           </a:p>
         </p:txBody>
@@ -12178,7 +12178,7 @@
                 </a:solidFill>
                 <a:latin typeface="Arial"/>
               </a:rPr>
-              <a:t>Play 3 — minister and architects</a:t>
+              <a:t>The commitment — the one page</a:t>
             </a:r>
           </a:p>
         </p:txBody>
@@ -12233,7 +12233,7 @@
                 </a:solidFill>
                 <a:latin typeface="Arial"/>
               </a:rPr>
-              <a:t>Play 4 — the governance artefacts</a:t>
+              <a:t>The capability — your own people</a:t>
             </a:r>
           </a:p>
         </p:txBody>
@@ -12288,7 +12288,7 @@
                 </a:solidFill>
                 <a:latin typeface="Arial"/>
               </a:rPr>
-              <a:t>Play 5 — comparators and transfer</a:t>
+              <a:t>Necessary now, not just useful</a:t>
             </a:r>
           </a:p>
         </p:txBody>
@@ -12322,7 +12322,7 @@
                 </a:solidFill>
                 <a:latin typeface="Arial"/>
               </a:rPr>
-              <a:t>4-part prompt · 5 plays · 4 safeguards · you decide, the AI drafts</a:t>
+              <a:t>4 governments · 4 killers to design out · 1 page for the minister</a:t>
             </a:r>
           </a:p>
         </p:txBody>
@@ -12447,7 +12447,7 @@
                 </a:solidFill>
                 <a:latin typeface="Arial"/>
               </a:rPr>
-              <a:t>Play 5 — Generate comparator cases and a sector-transfer plan</a:t>
+              <a:t>Roll it out — from one sector to a national EA practice</a:t>
             </a:r>
           </a:p>
         </p:txBody>
@@ -12481,7 +12481,7 @@
                 </a:solidFill>
                 <a:latin typeface="Arial"/>
               </a:rPr>
-              <a:t>The fifth play generates the persuasion material — comparator-country cards tuned to your context with real sources, and a one-page plan to run the method on a new sector — for the briefings and pitches where you need evidence and a path.</a:t>
+              <a:t>Rolling this out nationally is itself a wave roadmap — start with one sector that proves the pattern and builds the shared platforms, then bring sectors on one at a time, each cheaper than the last, until the architecture is how your whole government works.</a:t>
             </a:r>
           </a:p>
         </p:txBody>
@@ -12611,82 +12611,29 @@
                 </a:solidFill>
                 <a:latin typeface="Arial"/>
               </a:rPr>
-              <a:t>Comparator cards that look like your country, not always Estonia</a:t>
-            </a:r>
-          </a:p>
-        </p:txBody>
-      </p:sp>
-      <p:sp>
-        <p:nvSpPr>
-          <p:cNvPr id="4" name="TextBox 3"/>
-          <p:cNvSpPr txBox="1"/>
-          <p:nvPr/>
-        </p:nvSpPr>
-        <p:spPr>
-          <a:xfrm>
-            <a:off x="658368" y="1463040"/>
-            <a:ext cx="10984687" cy="1028699"/>
-          </a:xfrm>
-          <a:prstGeom prst="rect">
-            <a:avLst/>
-          </a:prstGeom>
-          <a:noFill/>
-        </p:spPr>
-        <p:txBody>
-          <a:bodyPr wrap="square">
-            <a:spAutoFit/>
-          </a:bodyPr>
-          <a:lstStyle/>
-          <a:p>
-            <a:pPr>
-              <a:spcAft>
-                <a:spcPts val="300"/>
-              </a:spcAft>
-            </a:pPr>
-            <a:r>
-              <a:rPr sz="1900" b="1" i="0">
-                <a:solidFill>
-                  <a:srgbClr val="1A1A1A"/>
-                </a:solidFill>
-                <a:latin typeface="Arial"/>
-              </a:rPr>
-              <a:t>Why it is comparable</a:t>
-            </a:r>
-          </a:p>
-          <a:p>
-            <a:pPr>
-              <a:spcAft>
-                <a:spcPts val="300"/>
-              </a:spcAft>
-            </a:pPr>
-            <a:r>
-              <a:rPr sz="1550" b="0" i="0">
-                <a:solidFill>
-                  <a:srgbClr val="595959"/>
-                </a:solidFill>
-                <a:latin typeface="Arial"/>
-              </a:rPr>
-              <a:t>One sentence against your size, income level, governance type and region.</a:t>
-            </a:r>
-          </a:p>
-        </p:txBody>
-      </p:sp>
-      <p:sp>
-        <p:nvSpPr>
-          <p:cNvPr id="5" name="Rectangle 4"/>
+              <a:t>Wave 1 looks like one sector. It is the foundation the rollout stands on</a:t>
+            </a:r>
+          </a:p>
+        </p:txBody>
+      </p:sp>
+      <p:sp>
+        <p:nvSpPr>
+          <p:cNvPr id="4" name="Rounded Rectangle 3"/>
           <p:cNvSpPr/>
           <p:nvPr/>
         </p:nvSpPr>
         <p:spPr>
           <a:xfrm>
-            <a:off x="621792" y="2496312"/>
-            <a:ext cx="10881360" cy="12700"/>
-          </a:xfrm>
-          <a:prstGeom prst="rect">
-            <a:avLst/>
+            <a:off x="2651760" y="1737360"/>
+            <a:ext cx="4754880" cy="1463040"/>
+          </a:xfrm>
+          <a:prstGeom prst="roundRect">
+            <a:avLst>
+              <a:gd name="adj" fmla="val 8000"/>
+            </a:avLst>
           </a:prstGeom>
           <a:solidFill>
-            <a:srgbClr val="DDECF4"/>
+            <a:srgbClr val="E5F5FB"/>
           </a:solidFill>
           <a:ln>
             <a:noFill/>
@@ -12708,84 +12655,60 @@
           </a:fontRef>
         </p:style>
         <p:txBody>
-          <a:bodyPr rtlCol="0" anchor="ctr"/>
+          <a:bodyPr rtlCol="0" anchor="t" lIns="128016" rIns="128016" tIns="91440" bIns="54864" wrap="square"/>
           <a:lstStyle/>
           <a:p>
-            <a:pPr algn="ctr"/>
-          </a:p>
-        </p:txBody>
-      </p:sp>
-      <p:sp>
-        <p:nvSpPr>
-          <p:cNvPr id="6" name="TextBox 5"/>
-          <p:cNvSpPr txBox="1"/>
-          <p:nvPr/>
-        </p:nvSpPr>
-        <p:spPr>
-          <a:xfrm>
-            <a:off x="658368" y="2537460"/>
-            <a:ext cx="10984687" cy="1028699"/>
-          </a:xfrm>
-          <a:prstGeom prst="rect">
-            <a:avLst/>
-          </a:prstGeom>
-          <a:noFill/>
-        </p:spPr>
-        <p:txBody>
-          <a:bodyPr wrap="square">
-            <a:spAutoFit/>
-          </a:bodyPr>
-          <a:lstStyle/>
-          <a:p>
-            <a:pPr>
+            <a:pPr algn="l">
               <a:spcAft>
                 <a:spcPts val="300"/>
               </a:spcAft>
             </a:pPr>
             <a:r>
-              <a:rPr sz="1900" b="1" i="0">
+              <a:rPr sz="1500" b="1" i="0">
+                <a:solidFill>
+                  <a:srgbClr val="006E96"/>
+                </a:solidFill>
+                <a:latin typeface="Arial"/>
+              </a:rPr>
+              <a:t>WAVE 1 — ONE SECTOR, THE FULL METHOD, END TO END</a:t>
+            </a:r>
+          </a:p>
+          <a:p>
+            <a:pPr algn="l">
+              <a:spcAft>
+                <a:spcPts val="300"/>
+              </a:spcAft>
+            </a:pPr>
+            <a:r>
+              <a:rPr sz="1300" b="0" i="0">
                 <a:solidFill>
                   <a:srgbClr val="1A1A1A"/>
                 </a:solidFill>
                 <a:latin typeface="Arial"/>
               </a:rPr>
-              <a:t>What they actually built</a:t>
-            </a:r>
-          </a:p>
-          <a:p>
-            <a:pPr>
-              <a:spcAft>
-                <a:spcPts val="300"/>
-              </a:spcAft>
-            </a:pPr>
-            <a:r>
-              <a:rPr sz="1550" b="0" i="0">
-                <a:solidFill>
-                  <a:srgbClr val="595959"/>
-                </a:solidFill>
-                <a:latin typeface="Arial"/>
-              </a:rPr>
-              <a:t>Two or three bullets — substance, not marketing.</a:t>
-            </a:r>
-          </a:p>
-        </p:txBody>
-      </p:sp>
-      <p:sp>
-        <p:nvSpPr>
-          <p:cNvPr id="7" name="Rectangle 6"/>
+              <a:t>A sector with a clear flagship the minister cares about — the single learner record, the single patient record.</a:t>
+            </a:r>
+          </a:p>
+        </p:txBody>
+      </p:sp>
+      <p:sp>
+        <p:nvSpPr>
+          <p:cNvPr id="5" name="Rounded Rectangle 4"/>
           <p:cNvSpPr/>
           <p:nvPr/>
         </p:nvSpPr>
         <p:spPr>
           <a:xfrm>
-            <a:off x="621792" y="3570732"/>
-            <a:ext cx="10881360" cy="12700"/>
-          </a:xfrm>
-          <a:prstGeom prst="rect">
-            <a:avLst/>
+            <a:off x="658368" y="3383280"/>
+            <a:ext cx="8732520" cy="1600200"/>
+          </a:xfrm>
+          <a:prstGeom prst="roundRect">
+            <a:avLst>
+              <a:gd name="adj" fmla="val 8000"/>
+            </a:avLst>
           </a:prstGeom>
           <a:solidFill>
-            <a:srgbClr val="DDECF4"/>
+            <a:srgbClr val="006E96"/>
           </a:solidFill>
           <a:ln>
             <a:noFill/>
@@ -12807,84 +12730,74 @@
           </a:fontRef>
         </p:style>
         <p:txBody>
-          <a:bodyPr rtlCol="0" anchor="ctr"/>
+          <a:bodyPr rtlCol="0" anchor="t" lIns="128016" rIns="128016" tIns="91440" bIns="54864" wrap="square"/>
           <a:lstStyle/>
           <a:p>
-            <a:pPr algn="ctr"/>
-          </a:p>
-        </p:txBody>
-      </p:sp>
-      <p:sp>
-        <p:nvSpPr>
-          <p:cNvPr id="8" name="TextBox 7"/>
-          <p:cNvSpPr txBox="1"/>
-          <p:nvPr/>
-        </p:nvSpPr>
-        <p:spPr>
-          <a:xfrm>
-            <a:off x="658368" y="3611879"/>
-            <a:ext cx="10984687" cy="1028699"/>
-          </a:xfrm>
-          <a:prstGeom prst="rect">
-            <a:avLst/>
-          </a:prstGeom>
-          <a:noFill/>
-        </p:spPr>
-        <p:txBody>
-          <a:bodyPr wrap="square">
-            <a:spAutoFit/>
-          </a:bodyPr>
-          <a:lstStyle/>
-          <a:p>
-            <a:pPr>
+            <a:pPr algn="l">
               <a:spcAft>
                 <a:spcPts val="300"/>
               </a:spcAft>
             </a:pPr>
             <a:r>
-              <a:rPr sz="1900" b="1" i="0">
+              <a:rPr sz="1500" b="1" i="0">
                 <a:solidFill>
-                  <a:srgbClr val="1A1A1A"/>
+                  <a:srgbClr val="FFFFFF"/>
                 </a:solidFill>
                 <a:latin typeface="Arial"/>
               </a:rPr>
-              <a:t>One transferable lesson</a:t>
-            </a:r>
-          </a:p>
-          <a:p>
-            <a:pPr>
+              <a:t>WHAT WAVE 1 REALLY BUILDS — THE NATIONAL FOUNDATIONS</a:t>
+            </a:r>
+          </a:p>
+          <a:p>
+            <a:pPr algn="l">
               <a:spcAft>
                 <a:spcPts val="300"/>
               </a:spcAft>
             </a:pPr>
             <a:r>
-              <a:rPr sz="1550" b="0" i="0">
+              <a:rPr sz="1300" b="0" i="0">
                 <a:solidFill>
-                  <a:srgbClr val="595959"/>
+                  <a:srgbClr val="FFFFFF"/>
                 </a:solidFill>
                 <a:latin typeface="Arial"/>
               </a:rPr>
-              <a:t>The thing you could do differently on Monday.</a:t>
-            </a:r>
-          </a:p>
-        </p:txBody>
-      </p:sp>
-      <p:sp>
-        <p:nvSpPr>
-          <p:cNvPr id="9" name="Rectangle 8"/>
+              <a:t>The permanent team  ·  the governance board  ·  the first shared platforms: identity, data exchange</a:t>
+            </a:r>
+          </a:p>
+          <a:p>
+            <a:pPr algn="l">
+              <a:spcAft>
+                <a:spcPts val="300"/>
+              </a:spcAft>
+            </a:pPr>
+            <a:r>
+              <a:rPr sz="1300" b="0" i="0">
+                <a:solidFill>
+                  <a:srgbClr val="FFFFFF"/>
+                </a:solidFill>
+                <a:latin typeface="Arial"/>
+              </a:rPr>
+              <a:t>Every later sector stands on this — none of them builds it again.</a:t>
+            </a:r>
+          </a:p>
+        </p:txBody>
+      </p:sp>
+      <p:sp>
+        <p:nvSpPr>
+          <p:cNvPr id="6" name="Rectangle 5"/>
           <p:cNvSpPr/>
           <p:nvPr/>
         </p:nvSpPr>
         <p:spPr>
           <a:xfrm>
-            <a:off x="621792" y="4645152"/>
-            <a:ext cx="10881360" cy="12700"/>
+            <a:off x="9646920" y="1737360"/>
+            <a:ext cx="45720" cy="3246120"/>
           </a:xfrm>
           <a:prstGeom prst="rect">
             <a:avLst/>
           </a:prstGeom>
           <a:solidFill>
-            <a:srgbClr val="DDECF4"/>
+            <a:srgbClr val="009CD6"/>
           </a:solidFill>
           <a:ln>
             <a:noFill/>
@@ -12915,14 +12828,14 @@
       </p:sp>
       <p:sp>
         <p:nvSpPr>
-          <p:cNvPr id="10" name="TextBox 9"/>
+          <p:cNvPr id="7" name="TextBox 6"/>
           <p:cNvSpPr txBox="1"/>
           <p:nvPr/>
         </p:nvSpPr>
         <p:spPr>
           <a:xfrm>
-            <a:off x="658368" y="4686300"/>
-            <a:ext cx="10984687" cy="1028699"/>
+            <a:off x="9829800" y="1737360"/>
+            <a:ext cx="1737360" cy="3246120"/>
           </a:xfrm>
           <a:prstGeom prst="rect">
             <a:avLst/>
@@ -12937,46 +12850,46 @@
           <a:p>
             <a:pPr>
               <a:spcAft>
-                <a:spcPts val="300"/>
+                <a:spcPts val="800"/>
               </a:spcAft>
             </a:pPr>
             <a:r>
-              <a:rPr sz="1900" b="1" i="0">
-                <a:solidFill>
-                  <a:srgbClr val="1A1A1A"/>
-                </a:solidFill>
-                <a:latin typeface="Arial"/>
-              </a:rPr>
-              <a:t>A public source for every substantive claim</a:t>
-            </a:r>
-          </a:p>
-          <a:p>
-            <a:pPr>
-              <a:spcAft>
-                <a:spcPts val="300"/>
-              </a:spcAft>
-            </a:pPr>
-            <a:r>
-              <a:rPr sz="1550" b="0" i="0">
+              <a:rPr sz="1250" b="0" i="1">
                 <a:solidFill>
                   <a:srgbClr val="595959"/>
                 </a:solidFill>
                 <a:latin typeface="Arial"/>
               </a:rPr>
-              <a:t>A URL you can open.</a:t>
-            </a:r>
-          </a:p>
-        </p:txBody>
-      </p:sp>
-      <p:sp>
-        <p:nvSpPr>
-          <p:cNvPr id="11" name="TextBox 10"/>
+              <a:t>The sector is what the minister sees.</a:t>
+            </a:r>
+          </a:p>
+          <a:p>
+            <a:pPr>
+              <a:spcAft>
+                <a:spcPts val="800"/>
+              </a:spcAft>
+            </a:pPr>
+            <a:r>
+              <a:rPr sz="1250" b="0" i="1">
+                <a:solidFill>
+                  <a:srgbClr val="595959"/>
+                </a:solidFill>
+                <a:latin typeface="Arial"/>
+              </a:rPr>
+              <a:t>The base is what the country keeps.</a:t>
+            </a:r>
+          </a:p>
+        </p:txBody>
+      </p:sp>
+      <p:sp>
+        <p:nvSpPr>
+          <p:cNvPr id="8" name="TextBox 7"/>
           <p:cNvSpPr txBox="1"/>
           <p:nvPr/>
         </p:nvSpPr>
         <p:spPr>
           <a:xfrm>
-            <a:off x="658368" y="5870448"/>
+            <a:off x="658368" y="5760720"/>
             <a:ext cx="10881360" cy="548640"/>
           </a:xfrm>
           <a:prstGeom prst="rect">
@@ -12997,14 +12910,14 @@
                 </a:solidFill>
                 <a:latin typeface="Arial"/>
               </a:rPr>
-              <a:t>Three to five countries, prioritising African and other developing-country examples.</a:t>
-            </a:r>
-          </a:p>
-        </p:txBody>
-      </p:sp>
-      <p:sp>
-        <p:nvSpPr>
-          <p:cNvPr id="12" name="TextBox 11"/>
+              <a:t>One sector, done well — and the national foundations, laid.</a:t>
+            </a:r>
+          </a:p>
+        </p:txBody>
+      </p:sp>
+      <p:sp>
+        <p:nvSpPr>
+          <p:cNvPr id="9" name="TextBox 8"/>
           <p:cNvSpPr txBox="1"/>
           <p:nvPr/>
         </p:nvSpPr>
@@ -13031,7 +12944,7 @@
                 </a:solidFill>
                 <a:latin typeface="Arial"/>
               </a:rPr>
-              <a:t>5.6 · Play 5 — Generate comparator cases and a sector-transfer plan</a:t>
+              <a:t>5.6 · Roll it out — from one sector to a national EA practice</a:t>
             </a:r>
           </a:p>
         </p:txBody>
@@ -13127,84 +13040,29 @@
                 </a:solidFill>
                 <a:latin typeface="Arial"/>
               </a:rPr>
-              <a:t>Cite or discard — this is where AI is most dangerous</a:t>
-            </a:r>
-          </a:p>
-        </p:txBody>
-      </p:sp>
-      <p:sp>
-        <p:nvSpPr>
-          <p:cNvPr id="4" name="TextBox 3"/>
-          <p:cNvSpPr txBox="1"/>
-          <p:nvPr/>
-        </p:nvSpPr>
-        <p:spPr>
-          <a:xfrm>
-            <a:off x="658368" y="1600200"/>
-            <a:ext cx="10881360" cy="1673352"/>
-          </a:xfrm>
-          <a:prstGeom prst="rect">
-            <a:avLst/>
-          </a:prstGeom>
-          <a:noFill/>
-        </p:spPr>
-        <p:txBody>
-          <a:bodyPr wrap="square">
-            <a:spAutoFit/>
-          </a:bodyPr>
-          <a:lstStyle/>
-          <a:p>
-            <a:pPr>
-              <a:spcAft>
-                <a:spcPts val="1200"/>
-              </a:spcAft>
-            </a:pPr>
-            <a:r>
-              <a:rPr sz="2000" b="0" i="0">
-                <a:solidFill>
-                  <a:srgbClr val="1A1A1A"/>
-                </a:solidFill>
-                <a:latin typeface="Arial"/>
-              </a:rPr>
-              <a:t>Every claim on a comparator card needs a real, checkable source. AI invents plausible-looking citations that do not say what the card claims, or do not exist at all.</a:t>
-            </a:r>
-          </a:p>
-          <a:p>
-            <a:pPr>
-              <a:spcAft>
-                <a:spcPts val="1200"/>
-              </a:spcAft>
-            </a:pPr>
-            <a:r>
-              <a:rPr sz="2000" b="0" i="0">
-                <a:solidFill>
-                  <a:srgbClr val="1A1A1A"/>
-                </a:solidFill>
-                <a:latin typeface="Arial"/>
-              </a:rPr>
-              <a:t>So open the source for every example. If it does not actually document what the card says, throw that example out — discard the claim, not just the citation.</a:t>
-            </a:r>
-          </a:p>
-        </p:txBody>
-      </p:sp>
-      <p:sp>
-        <p:nvSpPr>
-          <p:cNvPr id="5" name="Rounded Rectangle 4"/>
+              <a:t>From Wave 2 the rollout accelerates instead of getting harder</a:t>
+            </a:r>
+          </a:p>
+        </p:txBody>
+      </p:sp>
+      <p:sp>
+        <p:nvSpPr>
+          <p:cNvPr id="4" name="Rounded Rectangle 3"/>
           <p:cNvSpPr/>
           <p:nvPr/>
         </p:nvSpPr>
         <p:spPr>
           <a:xfrm>
-            <a:off x="658368" y="3456432"/>
-            <a:ext cx="10881360" cy="1325880"/>
+            <a:off x="658368" y="1554480"/>
+            <a:ext cx="10881360" cy="457200"/>
           </a:xfrm>
           <a:prstGeom prst="roundRect">
             <a:avLst>
-              <a:gd name="adj" fmla="val 4500"/>
+              <a:gd name="adj" fmla="val 30000"/>
             </a:avLst>
           </a:prstGeom>
           <a:solidFill>
-            <a:srgbClr val="E5F5FB"/>
+            <a:srgbClr val="006E96"/>
           </a:solidFill>
           <a:ln>
             <a:noFill/>
@@ -13226,55 +13084,725 @@
           </a:fontRef>
         </p:style>
         <p:txBody>
-          <a:bodyPr rtlCol="0" anchor="ctr"/>
+          <a:bodyPr rtlCol="0" anchor="ctr" wrap="square"/>
           <a:lstStyle/>
           <a:p>
             <a:pPr algn="ctr"/>
-          </a:p>
-        </p:txBody>
-      </p:sp>
-      <p:sp>
-        <p:nvSpPr>
-          <p:cNvPr id="6" name="TextBox 5"/>
-          <p:cNvSpPr txBox="1"/>
+            <a:r>
+              <a:rPr sz="1200" b="1" i="0">
+                <a:solidFill>
+                  <a:srgbClr val="FFFFFF"/>
+                </a:solidFill>
+                <a:latin typeface="Arial"/>
+              </a:rPr>
+              <a:t>THE EA BOARD GOVERNS THE PIPELINE — which sector next, what each must reuse, where an exception is warranted</a:t>
+            </a:r>
+          </a:p>
+        </p:txBody>
+      </p:sp>
+      <p:sp>
+        <p:nvSpPr>
+          <p:cNvPr id="5" name="Rounded Rectangle 4"/>
+          <p:cNvSpPr/>
           <p:nvPr/>
         </p:nvSpPr>
         <p:spPr>
           <a:xfrm>
-            <a:off x="859536" y="3648456"/>
-            <a:ext cx="10479024" cy="1051560"/>
-          </a:xfrm>
-          <a:prstGeom prst="rect">
-            <a:avLst/>
+            <a:off x="658368" y="2285999"/>
+            <a:ext cx="3574222" cy="2606040"/>
+          </a:xfrm>
+          <a:prstGeom prst="roundRect">
+            <a:avLst>
+              <a:gd name="adj" fmla="val 8000"/>
+            </a:avLst>
           </a:prstGeom>
-          <a:noFill/>
-        </p:spPr>
-        <p:txBody>
-          <a:bodyPr wrap="square">
-            <a:spAutoFit/>
-          </a:bodyPr>
+          <a:solidFill>
+            <a:srgbClr val="009CD6"/>
+          </a:solidFill>
+          <a:ln>
+            <a:noFill/>
+          </a:ln>
+          <a:effectLst/>
+        </p:spPr>
+        <p:style>
+          <a:lnRef idx="1">
+            <a:schemeClr val="accent1"/>
+          </a:lnRef>
+          <a:fillRef idx="3">
+            <a:schemeClr val="accent1"/>
+          </a:fillRef>
+          <a:effectRef idx="2">
+            <a:schemeClr val="accent1"/>
+          </a:effectRef>
+          <a:fontRef idx="minor">
+            <a:schemeClr val="lt1"/>
+          </a:fontRef>
+        </p:style>
+        <p:txBody>
+          <a:bodyPr rtlCol="0" anchor="t" lIns="128016" rIns="128016" tIns="91440" bIns="54864" wrap="square"/>
           <a:lstStyle/>
           <a:p>
-            <a:pPr>
+            <a:pPr algn="l">
               <a:spcAft>
-                <a:spcPts val="700"/>
+                <a:spcPts val="300"/>
               </a:spcAft>
             </a:pPr>
             <a:r>
-              <a:rPr sz="2300" b="1" i="0">
+              <a:rPr sz="1300" b="1" i="0">
+                <a:solidFill>
+                  <a:srgbClr val="FFFFFF"/>
+                </a:solidFill>
+                <a:latin typeface="Arial"/>
+              </a:rPr>
+              <a:t>WAVE 1 — education</a:t>
+            </a:r>
+          </a:p>
+          <a:p>
+            <a:pPr algn="l">
+              <a:spcAft>
+                <a:spcPts val="300"/>
+              </a:spcAft>
+            </a:pPr>
+            <a:r>
+              <a:rPr sz="1150" b="0" i="0">
+                <a:solidFill>
+                  <a:srgbClr val="FFFFFF"/>
+                </a:solidFill>
+                <a:latin typeface="Arial"/>
+              </a:rPr>
+              <a:t>Full method, end to end</a:t>
+            </a:r>
+          </a:p>
+          <a:p>
+            <a:pPr algn="l">
+              <a:spcAft>
+                <a:spcPts val="300"/>
+              </a:spcAft>
+            </a:pPr>
+            <a:r>
+              <a:rPr sz="1150" b="0" i="0">
+                <a:solidFill>
+                  <a:srgbClr val="FFFFFF"/>
+                </a:solidFill>
+                <a:latin typeface="Arial"/>
+              </a:rPr>
+              <a:t>Builds the team, the board, identity, data exchange</a:t>
+            </a:r>
+          </a:p>
+        </p:txBody>
+      </p:sp>
+      <p:sp>
+        <p:nvSpPr>
+          <p:cNvPr id="6" name="Rounded Rectangle 5"/>
+          <p:cNvSpPr/>
+          <p:nvPr/>
+        </p:nvSpPr>
+        <p:spPr>
+          <a:xfrm>
+            <a:off x="4397182" y="2859328"/>
+            <a:ext cx="2792361" cy="2032711"/>
+          </a:xfrm>
+          <a:prstGeom prst="roundRect">
+            <a:avLst>
+              <a:gd name="adj" fmla="val 8000"/>
+            </a:avLst>
+          </a:prstGeom>
+          <a:solidFill>
+            <a:srgbClr val="E5F5FB"/>
+          </a:solidFill>
+          <a:ln>
+            <a:noFill/>
+          </a:ln>
+          <a:effectLst/>
+        </p:spPr>
+        <p:style>
+          <a:lnRef idx="1">
+            <a:schemeClr val="accent1"/>
+          </a:lnRef>
+          <a:fillRef idx="3">
+            <a:schemeClr val="accent1"/>
+          </a:fillRef>
+          <a:effectRef idx="2">
+            <a:schemeClr val="accent1"/>
+          </a:effectRef>
+          <a:fontRef idx="minor">
+            <a:schemeClr val="lt1"/>
+          </a:fontRef>
+        </p:style>
+        <p:txBody>
+          <a:bodyPr rtlCol="0" anchor="t" lIns="128016" rIns="128016" tIns="91440" bIns="54864" wrap="square"/>
+          <a:lstStyle/>
+          <a:p>
+            <a:pPr algn="l">
+              <a:spcAft>
+                <a:spcPts val="300"/>
+              </a:spcAft>
+            </a:pPr>
+            <a:r>
+              <a:rPr sz="1300" b="1" i="0">
                 <a:solidFill>
                   <a:srgbClr val="006E96"/>
                 </a:solidFill>
                 <a:latin typeface="Arial"/>
               </a:rPr>
-              <a:t>A fabricated citation, caught in a cabinet meeting, discredits your whole briefing.</a:t>
-            </a:r>
-          </a:p>
-        </p:txBody>
-      </p:sp>
-      <p:sp>
-        <p:nvSpPr>
-          <p:cNvPr id="7" name="TextBox 6"/>
+              <a:t>WAVE 2 — health</a:t>
+            </a:r>
+          </a:p>
+          <a:p>
+            <a:pPr algn="l">
+              <a:spcAft>
+                <a:spcPts val="300"/>
+              </a:spcAft>
+            </a:pPr>
+            <a:r>
+              <a:rPr sz="1150" b="0" i="0">
+                <a:solidFill>
+                  <a:srgbClr val="1A1A1A"/>
+                </a:solidFill>
+                <a:latin typeface="Arial"/>
+              </a:rPr>
+              <a:t>Consumes the platforms</a:t>
+            </a:r>
+          </a:p>
+          <a:p>
+            <a:pPr algn="l">
+              <a:spcAft>
+                <a:spcPts val="300"/>
+              </a:spcAft>
+            </a:pPr>
+            <a:r>
+              <a:rPr sz="1150" b="0" i="0">
+                <a:solidFill>
+                  <a:srgbClr val="1A1A1A"/>
+                </a:solidFill>
+                <a:latin typeface="Arial"/>
+              </a:rPr>
+              <a:t>Lighter method — team and governance in place</a:t>
+            </a:r>
+          </a:p>
+        </p:txBody>
+      </p:sp>
+      <p:cxnSp>
+        <p:nvCxnSpPr>
+          <p:cNvPr id="7" name="Connector 6"/>
+          <p:cNvCxnSpPr/>
+          <p:nvPr/>
+        </p:nvCxnSpPr>
+        <p:spPr>
+          <a:xfrm>
+            <a:off x="4250878" y="4480559"/>
+            <a:ext cx="128016" cy="0"/>
+          </a:xfrm>
+          <a:prstGeom prst="line">
+            <a:avLst/>
+          </a:prstGeom>
+          <a:ln w="25400">
+            <a:solidFill>
+              <a:srgbClr val="006E96"/>
+            </a:solidFill>
+            <a:tailEnd type="triangle" w="med" len="med"/>
+          </a:ln>
+        </p:spPr>
+        <p:style>
+          <a:lnRef idx="2">
+            <a:schemeClr val="accent1"/>
+          </a:lnRef>
+          <a:fillRef idx="0">
+            <a:schemeClr val="accent1"/>
+          </a:fillRef>
+          <a:effectRef idx="1">
+            <a:schemeClr val="accent1"/>
+          </a:effectRef>
+          <a:fontRef idx="minor">
+            <a:schemeClr val="tx1"/>
+          </a:fontRef>
+        </p:style>
+      </p:cxnSp>
+      <p:sp>
+        <p:nvSpPr>
+          <p:cNvPr id="8" name="Rounded Rectangle 7"/>
+          <p:cNvSpPr/>
+          <p:nvPr/>
+        </p:nvSpPr>
+        <p:spPr>
+          <a:xfrm>
+            <a:off x="7354135" y="3276295"/>
+            <a:ext cx="2233889" cy="1615744"/>
+          </a:xfrm>
+          <a:prstGeom prst="roundRect">
+            <a:avLst>
+              <a:gd name="adj" fmla="val 8000"/>
+            </a:avLst>
+          </a:prstGeom>
+          <a:solidFill>
+            <a:srgbClr val="E5F5FB"/>
+          </a:solidFill>
+          <a:ln>
+            <a:noFill/>
+          </a:ln>
+          <a:effectLst/>
+        </p:spPr>
+        <p:style>
+          <a:lnRef idx="1">
+            <a:schemeClr val="accent1"/>
+          </a:lnRef>
+          <a:fillRef idx="3">
+            <a:schemeClr val="accent1"/>
+          </a:fillRef>
+          <a:effectRef idx="2">
+            <a:schemeClr val="accent1"/>
+          </a:effectRef>
+          <a:fontRef idx="minor">
+            <a:schemeClr val="lt1"/>
+          </a:fontRef>
+        </p:style>
+        <p:txBody>
+          <a:bodyPr rtlCol="0" anchor="t" lIns="128016" rIns="128016" tIns="91440" bIns="54864" wrap="square"/>
+          <a:lstStyle/>
+          <a:p>
+            <a:pPr algn="l">
+              <a:spcAft>
+                <a:spcPts val="300"/>
+              </a:spcAft>
+            </a:pPr>
+            <a:r>
+              <a:rPr sz="1300" b="1" i="0">
+                <a:solidFill>
+                  <a:srgbClr val="006E96"/>
+                </a:solidFill>
+                <a:latin typeface="Arial"/>
+              </a:rPr>
+              <a:t>WAVE 3 — agriculture</a:t>
+            </a:r>
+          </a:p>
+          <a:p>
+            <a:pPr algn="l">
+              <a:spcAft>
+                <a:spcPts val="300"/>
+              </a:spcAft>
+            </a:pPr>
+            <a:r>
+              <a:rPr sz="1150" b="0" i="0">
+                <a:solidFill>
+                  <a:srgbClr val="1A1A1A"/>
+                </a:solidFill>
+                <a:latin typeface="Arial"/>
+              </a:rPr>
+              <a:t>Consumes more</a:t>
+            </a:r>
+          </a:p>
+          <a:p>
+            <a:pPr algn="l">
+              <a:spcAft>
+                <a:spcPts val="300"/>
+              </a:spcAft>
+            </a:pPr>
+            <a:r>
+              <a:rPr sz="1150" b="0" i="0">
+                <a:solidFill>
+                  <a:srgbClr val="1A1A1A"/>
+                </a:solidFill>
+                <a:latin typeface="Arial"/>
+              </a:rPr>
+              <a:t>Faster, for less</a:t>
+            </a:r>
+          </a:p>
+        </p:txBody>
+      </p:sp>
+      <p:cxnSp>
+        <p:nvCxnSpPr>
+          <p:cNvPr id="9" name="Connector 8"/>
+          <p:cNvCxnSpPr/>
+          <p:nvPr/>
+        </p:nvCxnSpPr>
+        <p:spPr>
+          <a:xfrm>
+            <a:off x="7207831" y="4480559"/>
+            <a:ext cx="128016" cy="0"/>
+          </a:xfrm>
+          <a:prstGeom prst="line">
+            <a:avLst/>
+          </a:prstGeom>
+          <a:ln w="25400">
+            <a:solidFill>
+              <a:srgbClr val="006E96"/>
+            </a:solidFill>
+            <a:tailEnd type="triangle" w="med" len="med"/>
+          </a:ln>
+        </p:spPr>
+        <p:style>
+          <a:lnRef idx="2">
+            <a:schemeClr val="accent1"/>
+          </a:lnRef>
+          <a:fillRef idx="0">
+            <a:schemeClr val="accent1"/>
+          </a:fillRef>
+          <a:effectRef idx="1">
+            <a:schemeClr val="accent1"/>
+          </a:effectRef>
+          <a:fontRef idx="minor">
+            <a:schemeClr val="tx1"/>
+          </a:fontRef>
+        </p:style>
+      </p:cxnSp>
+      <p:sp>
+        <p:nvSpPr>
+          <p:cNvPr id="10" name="Rounded Rectangle 9"/>
+          <p:cNvSpPr/>
+          <p:nvPr/>
+        </p:nvSpPr>
+        <p:spPr>
+          <a:xfrm>
+            <a:off x="9752616" y="3589020"/>
+            <a:ext cx="1787111" cy="1303020"/>
+          </a:xfrm>
+          <a:prstGeom prst="roundRect">
+            <a:avLst>
+              <a:gd name="adj" fmla="val 8000"/>
+            </a:avLst>
+          </a:prstGeom>
+          <a:solidFill>
+            <a:srgbClr val="E5F5FB"/>
+          </a:solidFill>
+          <a:ln>
+            <a:noFill/>
+          </a:ln>
+          <a:effectLst/>
+        </p:spPr>
+        <p:style>
+          <a:lnRef idx="1">
+            <a:schemeClr val="accent1"/>
+          </a:lnRef>
+          <a:fillRef idx="3">
+            <a:schemeClr val="accent1"/>
+          </a:fillRef>
+          <a:effectRef idx="2">
+            <a:schemeClr val="accent1"/>
+          </a:effectRef>
+          <a:fontRef idx="minor">
+            <a:schemeClr val="lt1"/>
+          </a:fontRef>
+        </p:style>
+        <p:txBody>
+          <a:bodyPr rtlCol="0" anchor="t" lIns="128016" rIns="128016" tIns="91440" bIns="54864" wrap="square"/>
+          <a:lstStyle/>
+          <a:p>
+            <a:pPr algn="l">
+              <a:spcAft>
+                <a:spcPts val="300"/>
+              </a:spcAft>
+            </a:pPr>
+            <a:r>
+              <a:rPr sz="1300" b="1" i="0">
+                <a:solidFill>
+                  <a:srgbClr val="006E96"/>
+                </a:solidFill>
+                <a:latin typeface="Arial"/>
+              </a:rPr>
+              <a:t>WAVE 4 — social protection</a:t>
+            </a:r>
+          </a:p>
+          <a:p>
+            <a:pPr algn="l">
+              <a:spcAft>
+                <a:spcPts val="300"/>
+              </a:spcAft>
+            </a:pPr>
+            <a:r>
+              <a:rPr sz="1150" b="0" i="0">
+                <a:solidFill>
+                  <a:srgbClr val="1A1A1A"/>
+                </a:solidFill>
+                <a:latin typeface="Arial"/>
+              </a:rPr>
+              <a:t>Easier still</a:t>
+            </a:r>
+          </a:p>
+        </p:txBody>
+      </p:sp>
+      <p:cxnSp>
+        <p:nvCxnSpPr>
+          <p:cNvPr id="11" name="Connector 10"/>
+          <p:cNvCxnSpPr/>
+          <p:nvPr/>
+        </p:nvCxnSpPr>
+        <p:spPr>
+          <a:xfrm>
+            <a:off x="9606312" y="4480559"/>
+            <a:ext cx="128016" cy="0"/>
+          </a:xfrm>
+          <a:prstGeom prst="line">
+            <a:avLst/>
+          </a:prstGeom>
+          <a:ln w="25400">
+            <a:solidFill>
+              <a:srgbClr val="006E96"/>
+            </a:solidFill>
+            <a:tailEnd type="triangle" w="med" len="med"/>
+          </a:ln>
+        </p:spPr>
+        <p:style>
+          <a:lnRef idx="2">
+            <a:schemeClr val="accent1"/>
+          </a:lnRef>
+          <a:fillRef idx="0">
+            <a:schemeClr val="accent1"/>
+          </a:fillRef>
+          <a:effectRef idx="1">
+            <a:schemeClr val="accent1"/>
+          </a:effectRef>
+          <a:fontRef idx="minor">
+            <a:schemeClr val="tx1"/>
+          </a:fontRef>
+        </p:style>
+      </p:cxnSp>
+      <p:sp>
+        <p:nvSpPr>
+          <p:cNvPr id="12" name="Rectangle 11"/>
+          <p:cNvSpPr/>
+          <p:nvPr/>
+        </p:nvSpPr>
+        <p:spPr>
+          <a:xfrm>
+            <a:off x="658368" y="5248656"/>
+            <a:ext cx="3738814" cy="182880"/>
+          </a:xfrm>
+          <a:prstGeom prst="rect">
+            <a:avLst/>
+          </a:prstGeom>
+          <a:solidFill>
+            <a:srgbClr val="006E96"/>
+          </a:solidFill>
+          <a:ln>
+            <a:noFill/>
+          </a:ln>
+          <a:effectLst/>
+        </p:spPr>
+        <p:style>
+          <a:lnRef idx="1">
+            <a:schemeClr val="accent1"/>
+          </a:lnRef>
+          <a:fillRef idx="3">
+            <a:schemeClr val="accent1"/>
+          </a:fillRef>
+          <a:effectRef idx="2">
+            <a:schemeClr val="accent1"/>
+          </a:effectRef>
+          <a:fontRef idx="minor">
+            <a:schemeClr val="lt1"/>
+          </a:fontRef>
+        </p:style>
+        <p:txBody>
+          <a:bodyPr rtlCol="0" anchor="ctr"/>
+          <a:lstStyle/>
+          <a:p>
+            <a:pPr algn="ctr"/>
+          </a:p>
+        </p:txBody>
+      </p:sp>
+      <p:sp>
+        <p:nvSpPr>
+          <p:cNvPr id="13" name="Rectangle 12"/>
+          <p:cNvSpPr/>
+          <p:nvPr/>
+        </p:nvSpPr>
+        <p:spPr>
+          <a:xfrm>
+            <a:off x="4397182" y="5175504"/>
+            <a:ext cx="2956953" cy="256032"/>
+          </a:xfrm>
+          <a:prstGeom prst="rect">
+            <a:avLst/>
+          </a:prstGeom>
+          <a:solidFill>
+            <a:srgbClr val="009CD6"/>
+          </a:solidFill>
+          <a:ln>
+            <a:noFill/>
+          </a:ln>
+          <a:effectLst/>
+        </p:spPr>
+        <p:style>
+          <a:lnRef idx="1">
+            <a:schemeClr val="accent1"/>
+          </a:lnRef>
+          <a:fillRef idx="3">
+            <a:schemeClr val="accent1"/>
+          </a:fillRef>
+          <a:effectRef idx="2">
+            <a:schemeClr val="accent1"/>
+          </a:effectRef>
+          <a:fontRef idx="minor">
+            <a:schemeClr val="lt1"/>
+          </a:fontRef>
+        </p:style>
+        <p:txBody>
+          <a:bodyPr rtlCol="0" anchor="ctr"/>
+          <a:lstStyle/>
+          <a:p>
+            <a:pPr algn="ctr"/>
+          </a:p>
+        </p:txBody>
+      </p:sp>
+      <p:sp>
+        <p:nvSpPr>
+          <p:cNvPr id="14" name="Rectangle 13"/>
+          <p:cNvSpPr/>
+          <p:nvPr/>
+        </p:nvSpPr>
+        <p:spPr>
+          <a:xfrm>
+            <a:off x="7354135" y="5102352"/>
+            <a:ext cx="2398481" cy="329184"/>
+          </a:xfrm>
+          <a:prstGeom prst="rect">
+            <a:avLst/>
+          </a:prstGeom>
+          <a:solidFill>
+            <a:srgbClr val="009CD6"/>
+          </a:solidFill>
+          <a:ln>
+            <a:noFill/>
+          </a:ln>
+          <a:effectLst/>
+        </p:spPr>
+        <p:style>
+          <a:lnRef idx="1">
+            <a:schemeClr val="accent1"/>
+          </a:lnRef>
+          <a:fillRef idx="3">
+            <a:schemeClr val="accent1"/>
+          </a:fillRef>
+          <a:effectRef idx="2">
+            <a:schemeClr val="accent1"/>
+          </a:effectRef>
+          <a:fontRef idx="minor">
+            <a:schemeClr val="lt1"/>
+          </a:fontRef>
+        </p:style>
+        <p:txBody>
+          <a:bodyPr rtlCol="0" anchor="ctr"/>
+          <a:lstStyle/>
+          <a:p>
+            <a:pPr algn="ctr"/>
+          </a:p>
+        </p:txBody>
+      </p:sp>
+      <p:sp>
+        <p:nvSpPr>
+          <p:cNvPr id="15" name="Rectangle 14"/>
+          <p:cNvSpPr/>
+          <p:nvPr/>
+        </p:nvSpPr>
+        <p:spPr>
+          <a:xfrm>
+            <a:off x="9752616" y="5029200"/>
+            <a:ext cx="1787111" cy="402336"/>
+          </a:xfrm>
+          <a:prstGeom prst="rect">
+            <a:avLst/>
+          </a:prstGeom>
+          <a:solidFill>
+            <a:srgbClr val="009CD6"/>
+          </a:solidFill>
+          <a:ln>
+            <a:noFill/>
+          </a:ln>
+          <a:effectLst/>
+        </p:spPr>
+        <p:style>
+          <a:lnRef idx="1">
+            <a:schemeClr val="accent1"/>
+          </a:lnRef>
+          <a:fillRef idx="3">
+            <a:schemeClr val="accent1"/>
+          </a:fillRef>
+          <a:effectRef idx="2">
+            <a:schemeClr val="accent1"/>
+          </a:effectRef>
+          <a:fontRef idx="minor">
+            <a:schemeClr val="lt1"/>
+          </a:fontRef>
+        </p:style>
+        <p:txBody>
+          <a:bodyPr rtlCol="0" anchor="ctr"/>
+          <a:lstStyle/>
+          <a:p>
+            <a:pPr algn="ctr"/>
+          </a:p>
+        </p:txBody>
+      </p:sp>
+      <p:sp>
+        <p:nvSpPr>
+          <p:cNvPr id="16" name="TextBox 15"/>
+          <p:cNvSpPr txBox="1"/>
+          <p:nvPr/>
+        </p:nvSpPr>
+        <p:spPr>
+          <a:xfrm>
+            <a:off x="658368" y="5486400"/>
+            <a:ext cx="10881360" cy="320040"/>
+          </a:xfrm>
+          <a:prstGeom prst="rect">
+            <a:avLst/>
+          </a:prstGeom>
+          <a:noFill/>
+        </p:spPr>
+        <p:txBody>
+          <a:bodyPr wrap="square">
+            <a:spAutoFit/>
+          </a:bodyPr>
+          <a:lstStyle/>
+          <a:p>
+            <a:r>
+              <a:rPr sz="1150" b="1" i="0">
+                <a:solidFill>
+                  <a:srgbClr val="006E96"/>
+                </a:solidFill>
+                <a:latin typeface="Arial"/>
+              </a:rPr>
+              <a:t>Shared platforms — more complete with every wave</a:t>
+            </a:r>
+          </a:p>
+        </p:txBody>
+      </p:sp>
+      <p:sp>
+        <p:nvSpPr>
+          <p:cNvPr id="17" name="TextBox 16"/>
+          <p:cNvSpPr txBox="1"/>
+          <p:nvPr/>
+        </p:nvSpPr>
+        <p:spPr>
+          <a:xfrm>
+            <a:off x="658368" y="5806440"/>
+            <a:ext cx="10881360" cy="548640"/>
+          </a:xfrm>
+          <a:prstGeom prst="rect">
+            <a:avLst/>
+          </a:prstGeom>
+          <a:noFill/>
+        </p:spPr>
+        <p:txBody>
+          <a:bodyPr wrap="square">
+            <a:spAutoFit/>
+          </a:bodyPr>
+          <a:lstStyle/>
+          <a:p>
+            <a:r>
+              <a:rPr sz="1550" b="1" i="0">
+                <a:solidFill>
+                  <a:srgbClr val="006E96"/>
+                </a:solidFill>
+                <a:latin typeface="Arial"/>
+              </a:rPr>
+              <a:t>The opposite of a programme that gets harder under its own weight.</a:t>
+            </a:r>
+          </a:p>
+        </p:txBody>
+      </p:sp>
+      <p:sp>
+        <p:nvSpPr>
+          <p:cNvPr id="18" name="TextBox 17"/>
           <p:cNvSpPr txBox="1"/>
           <p:nvPr/>
         </p:nvSpPr>
@@ -13301,7 +13829,7 @@
                 </a:solidFill>
                 <a:latin typeface="Arial"/>
               </a:rPr>
-              <a:t>5.6 · Play 5 — Generate comparator cases and a sector-transfer plan</a:t>
+              <a:t>5.6 · Roll it out — from one sector to a national EA practice</a:t>
             </a:r>
           </a:p>
         </p:txBody>
@@ -13397,27 +13925,84 @@
                 </a:solidFill>
                 <a:latin typeface="Arial"/>
               </a:rPr>
-              <a:t>The sector-transfer plan — one page to start on a sector you were just handed</a:t>
-            </a:r>
-          </a:p>
-        </p:txBody>
-      </p:sp>
-      <p:sp>
-        <p:nvSpPr>
-          <p:cNvPr id="4" name="Oval 3"/>
+              <a:t>Govern the rollout — do not just launch it</a:t>
+            </a:r>
+          </a:p>
+        </p:txBody>
+      </p:sp>
+      <p:sp>
+        <p:nvSpPr>
+          <p:cNvPr id="4" name="TextBox 3"/>
+          <p:cNvSpPr txBox="1"/>
+          <p:nvPr/>
+        </p:nvSpPr>
+        <p:spPr>
+          <a:xfrm>
+            <a:off x="658368" y="1600200"/>
+            <a:ext cx="10881360" cy="2651760"/>
+          </a:xfrm>
+          <a:prstGeom prst="rect">
+            <a:avLst/>
+          </a:prstGeom>
+          <a:noFill/>
+        </p:spPr>
+        <p:txBody>
+          <a:bodyPr wrap="square">
+            <a:spAutoFit/>
+          </a:bodyPr>
+          <a:lstStyle/>
+          <a:p>
+            <a:pPr>
+              <a:spcAft>
+                <a:spcPts val="1200"/>
+              </a:spcAft>
+            </a:pPr>
+            <a:r>
+              <a:rPr sz="2000" b="0" i="0">
+                <a:solidFill>
+                  <a:srgbClr val="1A1A1A"/>
+                </a:solidFill>
+                <a:latin typeface="Arial"/>
+              </a:rPr>
+              <a:t>The same board that reviews projects inside a sector governs the national pipeline: which sector comes next, what each must reuse, and where an exception is genuinely warranted.</a:t>
+            </a:r>
+          </a:p>
+          <a:p>
+            <a:pPr>
+              <a:spcAft>
+                <a:spcPts val="1200"/>
+              </a:spcAft>
+            </a:pPr>
+            <a:r>
+              <a:rPr sz="2000" b="0" i="0">
+                <a:solidFill>
+                  <a:srgbClr val="1A1A1A"/>
+                </a:solidFill>
+                <a:latin typeface="Arial"/>
+              </a:rPr>
+              <a:t>A rollout that is launched and left drifts back into fragmentation, one sector at a time.</a:t>
+            </a:r>
+          </a:p>
+        </p:txBody>
+      </p:sp>
+      <p:sp>
+        <p:nvSpPr>
+          <p:cNvPr id="5" name="Rounded Rectangle 4"/>
           <p:cNvSpPr/>
           <p:nvPr/>
         </p:nvSpPr>
         <p:spPr>
           <a:xfrm>
-            <a:off x="621792" y="1508760"/>
-            <a:ext cx="310896" cy="310896"/>
-          </a:xfrm>
-          <a:prstGeom prst="ellipse">
-            <a:avLst/>
+            <a:off x="658368" y="4434840"/>
+            <a:ext cx="10881360" cy="1325880"/>
+          </a:xfrm>
+          <a:prstGeom prst="roundRect">
+            <a:avLst>
+              <a:gd name="adj" fmla="val 4500"/>
+            </a:avLst>
           </a:prstGeom>
           <a:solidFill>
-            <a:srgbClr val="009CD6"/>
+            <a:srgbClr val="E5F5FB"/>
           </a:solidFill>
           <a:ln>
             <a:noFill/>
@@ -13439,32 +14024,23 @@
           </a:fontRef>
         </p:style>
         <p:txBody>
-          <a:bodyPr rtlCol="0" anchor="ctr" lIns="0" rIns="0" tIns="0" bIns="0" wrap="square"/>
+          <a:bodyPr rtlCol="0" anchor="ctr"/>
           <a:lstStyle/>
           <a:p>
             <a:pPr algn="ctr"/>
-            <a:r>
-              <a:rPr sz="1300" b="1" i="0">
-                <a:solidFill>
-                  <a:srgbClr val="FFFFFF"/>
-                </a:solidFill>
-                <a:latin typeface="Arial"/>
-              </a:rPr>
-              <a:t>1</a:t>
-            </a:r>
-          </a:p>
-        </p:txBody>
-      </p:sp>
-      <p:sp>
-        <p:nvSpPr>
-          <p:cNvPr id="5" name="TextBox 4"/>
+          </a:p>
+        </p:txBody>
+      </p:sp>
+      <p:sp>
+        <p:nvSpPr>
+          <p:cNvPr id="6" name="TextBox 5"/>
           <p:cNvSpPr txBox="1"/>
           <p:nvPr/>
         </p:nvSpPr>
         <p:spPr>
           <a:xfrm>
-            <a:off x="1115568" y="1463040"/>
-            <a:ext cx="10527487" cy="1028699"/>
+            <a:off x="859536" y="4626864"/>
+            <a:ext cx="10479024" cy="1051560"/>
           </a:xfrm>
           <a:prstGeom prst="rect">
             <a:avLst/>
@@ -13479,530 +14055,24 @@
           <a:p>
             <a:pPr>
               <a:spcAft>
-                <a:spcPts val="300"/>
+                <a:spcPts val="700"/>
               </a:spcAft>
             </a:pPr>
             <a:r>
-              <a:rPr sz="1900" b="1" i="0">
-                <a:solidFill>
-                  <a:srgbClr val="1A1A1A"/>
-                </a:solidFill>
-                <a:latin typeface="Arial"/>
-              </a:rPr>
-              <a:t>The bodies, classified</a:t>
-            </a:r>
-          </a:p>
-          <a:p>
-            <a:pPr>
-              <a:spcAft>
-                <a:spcPts val="300"/>
-              </a:spcAft>
-            </a:pPr>
-            <a:r>
-              <a:rPr sz="1550" b="0" i="0">
-                <a:solidFill>
-                  <a:srgbClr val="595959"/>
-                </a:solidFill>
-                <a:latin typeface="Arial"/>
-              </a:rPr>
-              <a:t>Policy unit, regulator, service authority — in health, agriculture or social protection.</a:t>
-            </a:r>
-          </a:p>
-        </p:txBody>
-      </p:sp>
-      <p:sp>
-        <p:nvSpPr>
-          <p:cNvPr id="6" name="Rectangle 5"/>
-          <p:cNvSpPr/>
-          <p:nvPr/>
-        </p:nvSpPr>
-        <p:spPr>
-          <a:xfrm>
-            <a:off x="621792" y="2496312"/>
-            <a:ext cx="10881360" cy="12700"/>
-          </a:xfrm>
-          <a:prstGeom prst="rect">
-            <a:avLst/>
-          </a:prstGeom>
-          <a:solidFill>
-            <a:srgbClr val="DDECF4"/>
-          </a:solidFill>
-          <a:ln>
-            <a:noFill/>
-          </a:ln>
-          <a:effectLst/>
-        </p:spPr>
-        <p:style>
-          <a:lnRef idx="1">
-            <a:schemeClr val="accent1"/>
-          </a:lnRef>
-          <a:fillRef idx="3">
-            <a:schemeClr val="accent1"/>
-          </a:fillRef>
-          <a:effectRef idx="2">
-            <a:schemeClr val="accent1"/>
-          </a:effectRef>
-          <a:fontRef idx="minor">
-            <a:schemeClr val="lt1"/>
-          </a:fontRef>
-        </p:style>
-        <p:txBody>
-          <a:bodyPr rtlCol="0" anchor="ctr"/>
-          <a:lstStyle/>
-          <a:p>
-            <a:pPr algn="ctr"/>
-          </a:p>
-        </p:txBody>
-      </p:sp>
-      <p:sp>
-        <p:nvSpPr>
-          <p:cNvPr id="7" name="Oval 6"/>
-          <p:cNvSpPr/>
-          <p:nvPr/>
-        </p:nvSpPr>
-        <p:spPr>
-          <a:xfrm>
-            <a:off x="621792" y="2583179"/>
-            <a:ext cx="310896" cy="310896"/>
-          </a:xfrm>
-          <a:prstGeom prst="ellipse">
-            <a:avLst/>
-          </a:prstGeom>
-          <a:solidFill>
-            <a:srgbClr val="009CD6"/>
-          </a:solidFill>
-          <a:ln>
-            <a:noFill/>
-          </a:ln>
-          <a:effectLst/>
-        </p:spPr>
-        <p:style>
-          <a:lnRef idx="1">
-            <a:schemeClr val="accent1"/>
-          </a:lnRef>
-          <a:fillRef idx="3">
-            <a:schemeClr val="accent1"/>
-          </a:fillRef>
-          <a:effectRef idx="2">
-            <a:schemeClr val="accent1"/>
-          </a:effectRef>
-          <a:fontRef idx="minor">
-            <a:schemeClr val="lt1"/>
-          </a:fontRef>
-        </p:style>
-        <p:txBody>
-          <a:bodyPr rtlCol="0" anchor="ctr" lIns="0" rIns="0" tIns="0" bIns="0" wrap="square"/>
-          <a:lstStyle/>
-          <a:p>
-            <a:pPr algn="ctr"/>
-            <a:r>
-              <a:rPr sz="1300" b="1" i="0">
-                <a:solidFill>
-                  <a:srgbClr val="FFFFFF"/>
-                </a:solidFill>
-                <a:latin typeface="Arial"/>
-              </a:rPr>
-              <a:t>2</a:t>
-            </a:r>
-          </a:p>
-        </p:txBody>
-      </p:sp>
-      <p:sp>
-        <p:nvSpPr>
-          <p:cNvPr id="8" name="TextBox 7"/>
-          <p:cNvSpPr txBox="1"/>
-          <p:nvPr/>
-        </p:nvSpPr>
-        <p:spPr>
-          <a:xfrm>
-            <a:off x="1115568" y="2537460"/>
-            <a:ext cx="10527487" cy="1028699"/>
-          </a:xfrm>
-          <a:prstGeom prst="rect">
-            <a:avLst/>
-          </a:prstGeom>
-          <a:noFill/>
-        </p:spPr>
-        <p:txBody>
-          <a:bodyPr wrap="square">
-            <a:spAutoFit/>
-          </a:bodyPr>
-          <a:lstStyle/>
-          <a:p>
-            <a:pPr>
-              <a:spcAft>
-                <a:spcPts val="300"/>
-              </a:spcAft>
-            </a:pPr>
-            <a:r>
-              <a:rPr sz="1900" b="1" i="0">
-                <a:solidFill>
-                  <a:srgbClr val="1A1A1A"/>
-                </a:solidFill>
-                <a:latin typeface="Arial"/>
-              </a:rPr>
-              <a:t>This sector's equivalent of the single learner record</a:t>
-            </a:r>
-          </a:p>
-          <a:p>
-            <a:pPr>
-              <a:spcAft>
-                <a:spcPts val="300"/>
-              </a:spcAft>
-            </a:pPr>
-            <a:r>
-              <a:rPr sz="1550" b="0" i="0">
-                <a:solidFill>
-                  <a:srgbClr val="595959"/>
-                </a:solidFill>
-                <a:latin typeface="Arial"/>
-              </a:rPr>
-              <a:t>A patient record. A farmer registry. A beneficiary record.</a:t>
-            </a:r>
-          </a:p>
-        </p:txBody>
-      </p:sp>
-      <p:sp>
-        <p:nvSpPr>
-          <p:cNvPr id="9" name="Rectangle 8"/>
-          <p:cNvSpPr/>
-          <p:nvPr/>
-        </p:nvSpPr>
-        <p:spPr>
-          <a:xfrm>
-            <a:off x="621792" y="3570732"/>
-            <a:ext cx="10881360" cy="12700"/>
-          </a:xfrm>
-          <a:prstGeom prst="rect">
-            <a:avLst/>
-          </a:prstGeom>
-          <a:solidFill>
-            <a:srgbClr val="DDECF4"/>
-          </a:solidFill>
-          <a:ln>
-            <a:noFill/>
-          </a:ln>
-          <a:effectLst/>
-        </p:spPr>
-        <p:style>
-          <a:lnRef idx="1">
-            <a:schemeClr val="accent1"/>
-          </a:lnRef>
-          <a:fillRef idx="3">
-            <a:schemeClr val="accent1"/>
-          </a:fillRef>
-          <a:effectRef idx="2">
-            <a:schemeClr val="accent1"/>
-          </a:effectRef>
-          <a:fontRef idx="minor">
-            <a:schemeClr val="lt1"/>
-          </a:fontRef>
-        </p:style>
-        <p:txBody>
-          <a:bodyPr rtlCol="0" anchor="ctr"/>
-          <a:lstStyle/>
-          <a:p>
-            <a:pPr algn="ctr"/>
-          </a:p>
-        </p:txBody>
-      </p:sp>
-      <p:sp>
-        <p:nvSpPr>
-          <p:cNvPr id="10" name="Oval 9"/>
-          <p:cNvSpPr/>
-          <p:nvPr/>
-        </p:nvSpPr>
-        <p:spPr>
-          <a:xfrm>
-            <a:off x="621792" y="3657599"/>
-            <a:ext cx="310896" cy="310896"/>
-          </a:xfrm>
-          <a:prstGeom prst="ellipse">
-            <a:avLst/>
-          </a:prstGeom>
-          <a:solidFill>
-            <a:srgbClr val="009CD6"/>
-          </a:solidFill>
-          <a:ln>
-            <a:noFill/>
-          </a:ln>
-          <a:effectLst/>
-        </p:spPr>
-        <p:style>
-          <a:lnRef idx="1">
-            <a:schemeClr val="accent1"/>
-          </a:lnRef>
-          <a:fillRef idx="3">
-            <a:schemeClr val="accent1"/>
-          </a:fillRef>
-          <a:effectRef idx="2">
-            <a:schemeClr val="accent1"/>
-          </a:effectRef>
-          <a:fontRef idx="minor">
-            <a:schemeClr val="lt1"/>
-          </a:fontRef>
-        </p:style>
-        <p:txBody>
-          <a:bodyPr rtlCol="0" anchor="ctr" lIns="0" rIns="0" tIns="0" bIns="0" wrap="square"/>
-          <a:lstStyle/>
-          <a:p>
-            <a:pPr algn="ctr"/>
-            <a:r>
-              <a:rPr sz="1300" b="1" i="0">
-                <a:solidFill>
-                  <a:srgbClr val="FFFFFF"/>
-                </a:solidFill>
-                <a:latin typeface="Arial"/>
-              </a:rPr>
-              <a:t>3</a:t>
-            </a:r>
-          </a:p>
-        </p:txBody>
-      </p:sp>
-      <p:sp>
-        <p:nvSpPr>
-          <p:cNvPr id="11" name="TextBox 10"/>
-          <p:cNvSpPr txBox="1"/>
-          <p:nvPr/>
-        </p:nvSpPr>
-        <p:spPr>
-          <a:xfrm>
-            <a:off x="1115568" y="3611879"/>
-            <a:ext cx="10527487" cy="1028699"/>
-          </a:xfrm>
-          <a:prstGeom prst="rect">
-            <a:avLst/>
-          </a:prstGeom>
-          <a:noFill/>
-        </p:spPr>
-        <p:txBody>
-          <a:bodyPr wrap="square">
-            <a:spAutoFit/>
-          </a:bodyPr>
-          <a:lstStyle/>
-          <a:p>
-            <a:pPr>
-              <a:spcAft>
-                <a:spcPts val="300"/>
-              </a:spcAft>
-            </a:pPr>
-            <a:r>
-              <a:rPr sz="1900" b="1" i="0">
-                <a:solidFill>
-                  <a:srgbClr val="1A1A1A"/>
-                </a:solidFill>
-                <a:latin typeface="Arial"/>
-              </a:rPr>
-              <a:t>The five phase deliverables, named for this sector</a:t>
-            </a:r>
-          </a:p>
-          <a:p>
-            <a:pPr>
-              <a:spcAft>
-                <a:spcPts val="300"/>
-              </a:spcAft>
-            </a:pPr>
-            <a:r>
-              <a:rPr sz="1550" b="0" i="0">
-                <a:solidFill>
-                  <a:srgbClr val="595959"/>
-                </a:solidFill>
-                <a:latin typeface="Arial"/>
-              </a:rPr>
-              <a:t>The same outputs, in this sector's language.</a:t>
-            </a:r>
-          </a:p>
-        </p:txBody>
-      </p:sp>
-      <p:sp>
-        <p:nvSpPr>
-          <p:cNvPr id="12" name="Rectangle 11"/>
-          <p:cNvSpPr/>
-          <p:nvPr/>
-        </p:nvSpPr>
-        <p:spPr>
-          <a:xfrm>
-            <a:off x="621792" y="4645152"/>
-            <a:ext cx="10881360" cy="12700"/>
-          </a:xfrm>
-          <a:prstGeom prst="rect">
-            <a:avLst/>
-          </a:prstGeom>
-          <a:solidFill>
-            <a:srgbClr val="DDECF4"/>
-          </a:solidFill>
-          <a:ln>
-            <a:noFill/>
-          </a:ln>
-          <a:effectLst/>
-        </p:spPr>
-        <p:style>
-          <a:lnRef idx="1">
-            <a:schemeClr val="accent1"/>
-          </a:lnRef>
-          <a:fillRef idx="3">
-            <a:schemeClr val="accent1"/>
-          </a:fillRef>
-          <a:effectRef idx="2">
-            <a:schemeClr val="accent1"/>
-          </a:effectRef>
-          <a:fontRef idx="minor">
-            <a:schemeClr val="lt1"/>
-          </a:fontRef>
-        </p:style>
-        <p:txBody>
-          <a:bodyPr rtlCol="0" anchor="ctr"/>
-          <a:lstStyle/>
-          <a:p>
-            <a:pPr algn="ctr"/>
-          </a:p>
-        </p:txBody>
-      </p:sp>
-      <p:sp>
-        <p:nvSpPr>
-          <p:cNvPr id="13" name="Oval 12"/>
-          <p:cNvSpPr/>
-          <p:nvPr/>
-        </p:nvSpPr>
-        <p:spPr>
-          <a:xfrm>
-            <a:off x="621792" y="4732020"/>
-            <a:ext cx="310896" cy="310896"/>
-          </a:xfrm>
-          <a:prstGeom prst="ellipse">
-            <a:avLst/>
-          </a:prstGeom>
-          <a:solidFill>
-            <a:srgbClr val="009CD6"/>
-          </a:solidFill>
-          <a:ln>
-            <a:noFill/>
-          </a:ln>
-          <a:effectLst/>
-        </p:spPr>
-        <p:style>
-          <a:lnRef idx="1">
-            <a:schemeClr val="accent1"/>
-          </a:lnRef>
-          <a:fillRef idx="3">
-            <a:schemeClr val="accent1"/>
-          </a:fillRef>
-          <a:effectRef idx="2">
-            <a:schemeClr val="accent1"/>
-          </a:effectRef>
-          <a:fontRef idx="minor">
-            <a:schemeClr val="lt1"/>
-          </a:fontRef>
-        </p:style>
-        <p:txBody>
-          <a:bodyPr rtlCol="0" anchor="ctr" lIns="0" rIns="0" tIns="0" bIns="0" wrap="square"/>
-          <a:lstStyle/>
-          <a:p>
-            <a:pPr algn="ctr"/>
-            <a:r>
-              <a:rPr sz="1300" b="1" i="0">
-                <a:solidFill>
-                  <a:srgbClr val="FFFFFF"/>
-                </a:solidFill>
-                <a:latin typeface="Arial"/>
-              </a:rPr>
-              <a:t>4</a:t>
-            </a:r>
-          </a:p>
-        </p:txBody>
-      </p:sp>
-      <p:sp>
-        <p:nvSpPr>
-          <p:cNvPr id="14" name="TextBox 13"/>
-          <p:cNvSpPr txBox="1"/>
-          <p:nvPr/>
-        </p:nvSpPr>
-        <p:spPr>
-          <a:xfrm>
-            <a:off x="1115568" y="4686300"/>
-            <a:ext cx="10527487" cy="1028699"/>
-          </a:xfrm>
-          <a:prstGeom prst="rect">
-            <a:avLst/>
-          </a:prstGeom>
-          <a:noFill/>
-        </p:spPr>
-        <p:txBody>
-          <a:bodyPr wrap="square">
-            <a:spAutoFit/>
-          </a:bodyPr>
-          <a:lstStyle/>
-          <a:p>
-            <a:pPr>
-              <a:spcAft>
-                <a:spcPts val="300"/>
-              </a:spcAft>
-            </a:pPr>
-            <a:r>
-              <a:rPr sz="1900" b="1" i="0">
-                <a:solidFill>
-                  <a:srgbClr val="1A1A1A"/>
-                </a:solidFill>
-                <a:latin typeface="Arial"/>
-              </a:rPr>
-              <a:t>A suggested first two waves</a:t>
-            </a:r>
-          </a:p>
-          <a:p>
-            <a:pPr>
-              <a:spcAft>
-                <a:spcPts val="300"/>
-              </a:spcAft>
-            </a:pPr>
-            <a:r>
-              <a:rPr sz="1550" b="0" i="0">
-                <a:solidFill>
-                  <a:srgbClr val="595959"/>
-                </a:solidFill>
-                <a:latin typeface="Arial"/>
-              </a:rPr>
-              <a:t>Where to start, so something lands inside the first year.</a:t>
-            </a:r>
-          </a:p>
-        </p:txBody>
-      </p:sp>
-      <p:sp>
-        <p:nvSpPr>
-          <p:cNvPr id="15" name="TextBox 14"/>
-          <p:cNvSpPr txBox="1"/>
-          <p:nvPr/>
-        </p:nvSpPr>
-        <p:spPr>
-          <a:xfrm>
-            <a:off x="658368" y="5870448"/>
-            <a:ext cx="10881360" cy="548640"/>
-          </a:xfrm>
-          <a:prstGeom prst="rect">
-            <a:avLst/>
-          </a:prstGeom>
-          <a:noFill/>
-        </p:spPr>
-        <p:txBody>
-          <a:bodyPr wrap="square">
-            <a:spAutoFit/>
-          </a:bodyPr>
-          <a:lstStyle/>
-          <a:p>
-            <a:r>
-              <a:rPr sz="1550" b="1" i="0">
+              <a:rPr sz="2300" b="1" i="0">
                 <a:solidFill>
                   <a:srgbClr val="006E96"/>
                 </a:solidFill>
                 <a:latin typeface="Arial"/>
               </a:rPr>
-              <a:t>Only the institutions and the data domains change. The method does not.</a:t>
-            </a:r>
-          </a:p>
-        </p:txBody>
-      </p:sp>
-      <p:sp>
-        <p:nvSpPr>
-          <p:cNvPr id="16" name="TextBox 15"/>
+              <a:t>A governed rollout compounds into a single national architecture.</a:t>
+            </a:r>
+          </a:p>
+        </p:txBody>
+      </p:sp>
+      <p:sp>
+        <p:nvSpPr>
+          <p:cNvPr id="7" name="TextBox 6"/>
           <p:cNvSpPr txBox="1"/>
           <p:nvPr/>
         </p:nvSpPr>
@@ -14029,7 +14099,7 @@
                 </a:solidFill>
                 <a:latin typeface="Arial"/>
               </a:rPr>
-              <a:t>5.6 · Play 5 — Generate comparator cases and a sector-transfer plan</a:t>
+              <a:t>5.6 · Roll it out — from one sector to a national EA practice</a:t>
             </a:r>
           </a:p>
         </p:txBody>
@@ -14125,7 +14195,7 @@
                 </a:solidFill>
                 <a:latin typeface="Arial"/>
               </a:rPr>
-              <a:t>A plan to start Discovery faster, not a reason to skip it</a:t>
+              <a:t>One page, every quarter — the national scorecard</a:t>
             </a:r>
           </a:p>
         </p:txBody>
@@ -14138,8 +14208,8 @@
         </p:nvSpPr>
         <p:spPr>
           <a:xfrm>
-            <a:off x="658368" y="1600200"/>
-            <a:ext cx="10881360" cy="1673352"/>
+            <a:off x="658368" y="1463040"/>
+            <a:ext cx="10984687" cy="1386839"/>
           </a:xfrm>
           <a:prstGeom prst="rect">
             <a:avLst/>
@@ -14154,55 +14224,53 @@
           <a:p>
             <a:pPr>
               <a:spcAft>
-                <a:spcPts val="1200"/>
+                <a:spcPts val="300"/>
               </a:spcAft>
             </a:pPr>
             <a:r>
-              <a:rPr sz="2000" b="0" i="0">
+              <a:rPr sz="1900" b="1" i="0">
                 <a:solidFill>
                   <a:srgbClr val="1A1A1A"/>
                 </a:solidFill>
                 <a:latin typeface="Arial"/>
               </a:rPr>
-              <a:t>The transfer plan guesses the duplicated data domain and the likely gaps for the new sector — and it may guess wrong, because it has not looked.</a:t>
+              <a:t>Sectors live</a:t>
             </a:r>
           </a:p>
           <a:p>
             <a:pPr>
               <a:spcAft>
-                <a:spcPts val="1200"/>
+                <a:spcPts val="300"/>
               </a:spcAft>
             </a:pPr>
             <a:r>
-              <a:rPr sz="2000" b="0" i="0">
+              <a:rPr sz="1550" b="0" i="0">
                 <a:solidFill>
-                  <a:srgbClr val="1A1A1A"/>
+                  <a:srgbClr val="595959"/>
                 </a:solidFill>
                 <a:latin typeface="Arial"/>
               </a:rPr>
-              <a:t>The real gaps come from running the method on the real sector, not from a plan written before anyone has looked.</a:t>
-            </a:r>
-          </a:p>
-        </p:txBody>
-      </p:sp>
-      <p:sp>
-        <p:nvSpPr>
-          <p:cNvPr id="5" name="Rounded Rectangle 4"/>
+              <a:t>How many have run the method end to end.</a:t>
+            </a:r>
+          </a:p>
+        </p:txBody>
+      </p:sp>
+      <p:sp>
+        <p:nvSpPr>
+          <p:cNvPr id="5" name="Rectangle 4"/>
           <p:cNvSpPr/>
           <p:nvPr/>
         </p:nvSpPr>
         <p:spPr>
           <a:xfrm>
-            <a:off x="658368" y="3456432"/>
-            <a:ext cx="10881360" cy="1325880"/>
-          </a:xfrm>
-          <a:prstGeom prst="roundRect">
-            <a:avLst>
-              <a:gd name="adj" fmla="val 4500"/>
-            </a:avLst>
+            <a:off x="621792" y="2854452"/>
+            <a:ext cx="10881360" cy="12700"/>
+          </a:xfrm>
+          <a:prstGeom prst="rect">
+            <a:avLst/>
           </a:prstGeom>
           <a:solidFill>
-            <a:srgbClr val="E5F5FB"/>
+            <a:srgbClr val="DDECF4"/>
           </a:solidFill>
           <a:ln>
             <a:noFill/>
@@ -14239,8 +14307,8 @@
         </p:nvSpPr>
         <p:spPr>
           <a:xfrm>
-            <a:off x="859536" y="3648456"/>
-            <a:ext cx="10479024" cy="1051560"/>
+            <a:off x="658368" y="2895600"/>
+            <a:ext cx="10984687" cy="1386839"/>
           </a:xfrm>
           <a:prstGeom prst="rect">
             <a:avLst/>
@@ -14255,24 +14323,173 @@
           <a:p>
             <a:pPr>
               <a:spcAft>
-                <a:spcPts val="700"/>
+                <a:spcPts val="300"/>
               </a:spcAft>
             </a:pPr>
             <a:r>
-              <a:rPr sz="2300" b="1" i="0">
+              <a:rPr sz="1900" b="1" i="0">
+                <a:solidFill>
+                  <a:srgbClr val="1A1A1A"/>
+                </a:solidFill>
+                <a:latin typeface="Arial"/>
+              </a:rPr>
+              <a:t>The re-use rate across them</a:t>
+            </a:r>
+          </a:p>
+          <a:p>
+            <a:pPr>
+              <a:spcAft>
+                <a:spcPts val="300"/>
+              </a:spcAft>
+            </a:pPr>
+            <a:r>
+              <a:rPr sz="1550" b="0" i="0">
+                <a:solidFill>
+                  <a:srgbClr val="595959"/>
+                </a:solidFill>
+                <a:latin typeface="Arial"/>
+              </a:rPr>
+              <a:t>How much of the new work consumes a shared block instead of rebuilding it.</a:t>
+            </a:r>
+          </a:p>
+        </p:txBody>
+      </p:sp>
+      <p:sp>
+        <p:nvSpPr>
+          <p:cNvPr id="7" name="Rectangle 6"/>
+          <p:cNvSpPr/>
+          <p:nvPr/>
+        </p:nvSpPr>
+        <p:spPr>
+          <a:xfrm>
+            <a:off x="621792" y="4287011"/>
+            <a:ext cx="10881360" cy="12700"/>
+          </a:xfrm>
+          <a:prstGeom prst="rect">
+            <a:avLst/>
+          </a:prstGeom>
+          <a:solidFill>
+            <a:srgbClr val="DDECF4"/>
+          </a:solidFill>
+          <a:ln>
+            <a:noFill/>
+          </a:ln>
+          <a:effectLst/>
+        </p:spPr>
+        <p:style>
+          <a:lnRef idx="1">
+            <a:schemeClr val="accent1"/>
+          </a:lnRef>
+          <a:fillRef idx="3">
+            <a:schemeClr val="accent1"/>
+          </a:fillRef>
+          <a:effectRef idx="2">
+            <a:schemeClr val="accent1"/>
+          </a:effectRef>
+          <a:fontRef idx="minor">
+            <a:schemeClr val="lt1"/>
+          </a:fontRef>
+        </p:style>
+        <p:txBody>
+          <a:bodyPr rtlCol="0" anchor="ctr"/>
+          <a:lstStyle/>
+          <a:p>
+            <a:pPr algn="ctr"/>
+          </a:p>
+        </p:txBody>
+      </p:sp>
+      <p:sp>
+        <p:nvSpPr>
+          <p:cNvPr id="8" name="TextBox 7"/>
+          <p:cNvSpPr txBox="1"/>
+          <p:nvPr/>
+        </p:nvSpPr>
+        <p:spPr>
+          <a:xfrm>
+            <a:off x="658368" y="4328159"/>
+            <a:ext cx="10984687" cy="1386839"/>
+          </a:xfrm>
+          <a:prstGeom prst="rect">
+            <a:avLst/>
+          </a:prstGeom>
+          <a:noFill/>
+        </p:spPr>
+        <p:txBody>
+          <a:bodyPr wrap="square">
+            <a:spAutoFit/>
+          </a:bodyPr>
+          <a:lstStyle/>
+          <a:p>
+            <a:pPr>
+              <a:spcAft>
+                <a:spcPts val="300"/>
+              </a:spcAft>
+            </a:pPr>
+            <a:r>
+              <a:rPr sz="1900" b="1" i="0">
+                <a:solidFill>
+                  <a:srgbClr val="1A1A1A"/>
+                </a:solidFill>
+                <a:latin typeface="Arial"/>
+              </a:rPr>
+              <a:t>Shared platforms in place</a:t>
+            </a:r>
+          </a:p>
+          <a:p>
+            <a:pPr>
+              <a:spcAft>
+                <a:spcPts val="300"/>
+              </a:spcAft>
+            </a:pPr>
+            <a:r>
+              <a:rPr sz="1550" b="0" i="0">
+                <a:solidFill>
+                  <a:srgbClr val="595959"/>
+                </a:solidFill>
+                <a:latin typeface="Arial"/>
+              </a:rPr>
+              <a:t>Which of identity, payments and data exchange are authoritative and available.</a:t>
+            </a:r>
+          </a:p>
+        </p:txBody>
+      </p:sp>
+      <p:sp>
+        <p:nvSpPr>
+          <p:cNvPr id="9" name="TextBox 8"/>
+          <p:cNvSpPr txBox="1"/>
+          <p:nvPr/>
+        </p:nvSpPr>
+        <p:spPr>
+          <a:xfrm>
+            <a:off x="658368" y="5870448"/>
+            <a:ext cx="10881360" cy="548640"/>
+          </a:xfrm>
+          <a:prstGeom prst="rect">
+            <a:avLst/>
+          </a:prstGeom>
+          <a:noFill/>
+        </p:spPr>
+        <p:txBody>
+          <a:bodyPr wrap="square">
+            <a:spAutoFit/>
+          </a:bodyPr>
+          <a:lstStyle/>
+          <a:p>
+            <a:r>
+              <a:rPr sz="1550" b="1" i="0">
                 <a:solidFill>
                   <a:srgbClr val="006E96"/>
                 </a:solidFill>
                 <a:latin typeface="Arial"/>
               </a:rPr>
-              <a:t>It is a starting structure, not an assessment.</a:t>
-            </a:r>
-          </a:p>
-        </p:txBody>
-      </p:sp>
-      <p:sp>
-        <p:nvSpPr>
-          <p:cNvPr id="7" name="TextBox 6"/>
+              <a:t>It sustains funding across a change of government, and catches a drifting sector early.</a:t>
+            </a:r>
+          </a:p>
+        </p:txBody>
+      </p:sp>
+      <p:sp>
+        <p:nvSpPr>
+          <p:cNvPr id="10" name="TextBox 9"/>
           <p:cNvSpPr txBox="1"/>
           <p:nvPr/>
         </p:nvSpPr>
@@ -14299,7 +14516,7 @@
                 </a:solidFill>
                 <a:latin typeface="Arial"/>
               </a:rPr>
-              <a:t>5.6 · Play 5 — Generate comparator cases and a sector-transfer plan</a:t>
+              <a:t>5.6 · Roll it out — from one sector to a national EA practice</a:t>
             </a:r>
           </a:p>
         </p:txBody>
@@ -14351,7 +14568,7 @@
                 </a:solidFill>
                 <a:latin typeface="Arial"/>
               </a:rPr>
-              <a:t>This play generates comparator cards tuned to your context and a sector-transfer plan — fast — under one rule: cite every source or discard the claim, and confirm by looking.</a:t>
+              <a:t>Roll it out as a wave roadmap — one sector first to prove the pattern and build the shared platforms, then sectors one at a time, each cheaper, governed into a single national architecture.</a:t>
             </a:r>
           </a:p>
         </p:txBody>
@@ -14419,7 +14636,7 @@
                 </a:solidFill>
                 <a:latin typeface="Arial"/>
               </a:rPr>
-              <a:t>5.6 · Play 5 — Generate comparator cases and a sector-transfer plan</a:t>
+              <a:t>5.6 · Roll it out — from one sector to a national EA practice</a:t>
             </a:r>
           </a:p>
         </p:txBody>
@@ -14673,7 +14890,7 @@
                 </a:solidFill>
                 <a:latin typeface="Arial"/>
               </a:rPr>
-              <a:t>5.6 · Play 5 — Generate comparator cases and a sector-transfer plan</a:t>
+              <a:t>5.6 · Roll it out — from one sector to a national EA practice</a:t>
             </a:r>
           </a:p>
         </p:txBody>
